--- a/WerkstattPilot/07_backup/arbeitsgruppe3-praesentation.pptx
+++ b/WerkstattPilot/07_backup/arbeitsgruppe3-praesentation.pptx
@@ -314,7 +314,7 @@
           <a:p>
             <a:fld id="{5BCAD085-E8A6-8845-BD4E-CB4CCA059FC4}" type="datetimeFigureOut">
               <a:rPr lang="en-US" smtClean="0"/>
-              <a:t>6/10/2026</a:t>
+              <a:t>6/12/2026</a:t>
             </a:fld>
             <a:endParaRPr lang="en-US"/>
           </a:p>
@@ -482,7 +482,7 @@
           <a:p>
             <a:fld id="{5BCAD085-E8A6-8845-BD4E-CB4CCA059FC4}" type="datetimeFigureOut">
               <a:rPr lang="en-US" smtClean="0"/>
-              <a:t>6/10/2026</a:t>
+              <a:t>6/12/2026</a:t>
             </a:fld>
             <a:endParaRPr lang="en-US"/>
           </a:p>
@@ -660,7 +660,7 @@
           <a:p>
             <a:fld id="{5BCAD085-E8A6-8845-BD4E-CB4CCA059FC4}" type="datetimeFigureOut">
               <a:rPr lang="en-US" smtClean="0"/>
-              <a:t>6/10/2026</a:t>
+              <a:t>6/12/2026</a:t>
             </a:fld>
             <a:endParaRPr lang="en-US"/>
           </a:p>
@@ -828,7 +828,7 @@
           <a:p>
             <a:fld id="{5BCAD085-E8A6-8845-BD4E-CB4CCA059FC4}" type="datetimeFigureOut">
               <a:rPr lang="en-US" smtClean="0"/>
-              <a:t>6/10/2026</a:t>
+              <a:t>6/12/2026</a:t>
             </a:fld>
             <a:endParaRPr lang="en-US"/>
           </a:p>
@@ -1073,7 +1073,7 @@
           <a:p>
             <a:fld id="{5BCAD085-E8A6-8845-BD4E-CB4CCA059FC4}" type="datetimeFigureOut">
               <a:rPr lang="en-US" smtClean="0"/>
-              <a:t>6/10/2026</a:t>
+              <a:t>6/12/2026</a:t>
             </a:fld>
             <a:endParaRPr lang="en-US"/>
           </a:p>
@@ -1358,7 +1358,7 @@
           <a:p>
             <a:fld id="{5BCAD085-E8A6-8845-BD4E-CB4CCA059FC4}" type="datetimeFigureOut">
               <a:rPr lang="en-US" smtClean="0"/>
-              <a:t>6/10/2026</a:t>
+              <a:t>6/12/2026</a:t>
             </a:fld>
             <a:endParaRPr lang="en-US"/>
           </a:p>
@@ -1777,7 +1777,7 @@
           <a:p>
             <a:fld id="{5BCAD085-E8A6-8845-BD4E-CB4CCA059FC4}" type="datetimeFigureOut">
               <a:rPr lang="en-US" smtClean="0"/>
-              <a:t>6/10/2026</a:t>
+              <a:t>6/12/2026</a:t>
             </a:fld>
             <a:endParaRPr lang="en-US"/>
           </a:p>
@@ -1894,7 +1894,7 @@
           <a:p>
             <a:fld id="{5BCAD085-E8A6-8845-BD4E-CB4CCA059FC4}" type="datetimeFigureOut">
               <a:rPr lang="en-US" smtClean="0"/>
-              <a:t>6/10/2026</a:t>
+              <a:t>6/12/2026</a:t>
             </a:fld>
             <a:endParaRPr lang="en-US"/>
           </a:p>
@@ -1989,7 +1989,7 @@
           <a:p>
             <a:fld id="{5BCAD085-E8A6-8845-BD4E-CB4CCA059FC4}" type="datetimeFigureOut">
               <a:rPr lang="en-US" smtClean="0"/>
-              <a:t>6/10/2026</a:t>
+              <a:t>6/12/2026</a:t>
             </a:fld>
             <a:endParaRPr lang="en-US"/>
           </a:p>
@@ -2264,7 +2264,7 @@
           <a:p>
             <a:fld id="{5BCAD085-E8A6-8845-BD4E-CB4CCA059FC4}" type="datetimeFigureOut">
               <a:rPr lang="en-US" smtClean="0"/>
-              <a:t>6/10/2026</a:t>
+              <a:t>6/12/2026</a:t>
             </a:fld>
             <a:endParaRPr lang="en-US"/>
           </a:p>
@@ -2516,7 +2516,7 @@
           <a:p>
             <a:fld id="{5BCAD085-E8A6-8845-BD4E-CB4CCA059FC4}" type="datetimeFigureOut">
               <a:rPr lang="en-US" smtClean="0"/>
-              <a:t>6/10/2026</a:t>
+              <a:t>6/12/2026</a:t>
             </a:fld>
             <a:endParaRPr lang="en-US"/>
           </a:p>
@@ -2727,7 +2727,7 @@
           <a:p>
             <a:fld id="{5BCAD085-E8A6-8845-BD4E-CB4CCA059FC4}" type="datetimeFigureOut">
               <a:rPr lang="en-US" smtClean="0"/>
-              <a:t>6/10/2026</a:t>
+              <a:t>6/12/2026</a:t>
             </a:fld>
             <a:endParaRPr lang="en-US"/>
           </a:p>
@@ -3895,7 +3895,7 @@
         <p:spPr>
           <a:xfrm>
             <a:off x="612648" y="3108960"/>
-            <a:ext cx="4846320" cy="3108960"/>
+            <a:ext cx="4846320" cy="2286000"/>
           </a:xfrm>
           <a:prstGeom prst="roundRect">
             <a:avLst/>
@@ -4756,24 +4756,94 @@
               </a:defRPr>
             </a:pPr>
             <a:r>
-              <a:rPr>
-                <a:latin typeface="Arial"/>
-              </a:rPr>
-              <a:t>Alle Persistence-Tests erfolgreich.</a:t>
-            </a:r>
-            <a:br/>
-            <a:r>
-              <a:rPr>
-                <a:latin typeface="Arial"/>
-              </a:rPr>
-              <a:t>Alle Business-Tests erfolgreich.</a:t>
-            </a:r>
-            <a:br/>
-            <a:r>
-              <a:rPr>
-                <a:latin typeface="Arial"/>
-              </a:rPr>
-              <a:t>WerkstattPilot Endbenutzertest: 3 Aufträge erstellt und Status geändert.</a:t>
+              <a:rPr dirty="0">
+                <a:latin typeface="Arial"/>
+              </a:rPr>
+              <a:t>Alle Persistence-Tests </a:t>
+            </a:r>
+            <a:r>
+              <a:rPr dirty="0" err="1">
+                <a:latin typeface="Arial"/>
+              </a:rPr>
+              <a:t>erfolgreich</a:t>
+            </a:r>
+            <a:r>
+              <a:rPr dirty="0">
+                <a:latin typeface="Arial"/>
+              </a:rPr>
+              <a:t>.</a:t>
+            </a:r>
+            <a:br>
+              <a:rPr dirty="0"/>
+            </a:br>
+            <a:r>
+              <a:rPr dirty="0">
+                <a:latin typeface="Arial"/>
+              </a:rPr>
+              <a:t>Alle Business-Tests </a:t>
+            </a:r>
+            <a:r>
+              <a:rPr dirty="0" err="1">
+                <a:latin typeface="Arial"/>
+              </a:rPr>
+              <a:t>erfolgreich</a:t>
+            </a:r>
+            <a:r>
+              <a:rPr dirty="0">
+                <a:latin typeface="Arial"/>
+              </a:rPr>
+              <a:t>.</a:t>
+            </a:r>
+            <a:br>
+              <a:rPr dirty="0"/>
+            </a:br>
+            <a:r>
+              <a:rPr dirty="0" err="1">
+                <a:latin typeface="Arial"/>
+              </a:rPr>
+              <a:t>WerkstattPilot</a:t>
+            </a:r>
+            <a:r>
+              <a:rPr dirty="0">
+                <a:latin typeface="Arial"/>
+              </a:rPr>
+              <a:t> Endbenutzertest: 3 </a:t>
+            </a:r>
+            <a:r>
+              <a:rPr dirty="0" err="1">
+                <a:latin typeface="Arial"/>
+              </a:rPr>
+              <a:t>Aufträge</a:t>
+            </a:r>
+            <a:r>
+              <a:rPr dirty="0">
+                <a:latin typeface="Arial"/>
+              </a:rPr>
+              <a:t> </a:t>
+            </a:r>
+            <a:r>
+              <a:rPr dirty="0" err="1">
+                <a:latin typeface="Arial"/>
+              </a:rPr>
+              <a:t>erstellt</a:t>
+            </a:r>
+            <a:r>
+              <a:rPr dirty="0">
+                <a:latin typeface="Arial"/>
+              </a:rPr>
+              <a:t> und Status </a:t>
+            </a:r>
+            <a:r>
+              <a:rPr dirty="0" err="1">
+                <a:latin typeface="Arial"/>
+              </a:rPr>
+              <a:t>geändert</a:t>
+            </a:r>
+            <a:r>
+              <a:rPr dirty="0">
+                <a:latin typeface="Arial"/>
+              </a:rPr>
+              <a:t>.</a:t>
             </a:r>
           </a:p>
         </p:txBody>
@@ -5065,7 +5135,7 @@
         <p:spPr>
           <a:xfrm>
             <a:off x="530352" y="3255264"/>
-            <a:ext cx="4480560" cy="2377440"/>
+            <a:ext cx="4480560" cy="1503167"/>
           </a:xfrm>
           <a:prstGeom prst="roundRect">
             <a:avLst/>
@@ -5673,7 +5743,7 @@
         <p:spPr>
           <a:xfrm>
             <a:off x="530352" y="2980944"/>
-            <a:ext cx="3657600" cy="3291840"/>
+            <a:ext cx="3657600" cy="1848508"/>
           </a:xfrm>
           <a:prstGeom prst="roundRect">
             <a:avLst/>
@@ -8894,7 +8964,7 @@
       </p:sp>
       <p:pic>
         <p:nvPicPr>
-          <p:cNvPr id="5" name="Picture 4" descr="uml_integriert_aktualisiert.png"/>
+          <p:cNvPr id="5" name="Picture 4"/>
           <p:cNvPicPr>
             <a:picLocks noChangeAspect="1"/>
           </p:cNvPicPr>
@@ -8902,14 +8972,13 @@
         </p:nvPicPr>
         <p:blipFill>
           <a:blip r:embed="rId2"/>
-          <a:stretch>
-            <a:fillRect/>
-          </a:stretch>
+          <a:srcRect/>
+          <a:stretch/>
         </p:blipFill>
         <p:spPr>
           <a:xfrm>
-            <a:off x="2240280" y="1325880"/>
-            <a:ext cx="7296912" cy="4800600"/>
+            <a:off x="2623897" y="1188720"/>
+            <a:ext cx="6785710" cy="5212080"/>
           </a:xfrm>
           <a:prstGeom prst="rect">
             <a:avLst/>

--- a/WerkstattPilot/07_backup/arbeitsgruppe3-praesentation.pptx
+++ b/WerkstattPilot/07_backup/arbeitsgruppe3-praesentation.pptx
@@ -4690,7 +4690,7 @@
         <p:spPr>
           <a:xfrm>
             <a:off x="914400" y="3657600"/>
-            <a:ext cx="10332720" cy="1417320"/>
+            <a:ext cx="10332720" cy="1111045"/>
           </a:xfrm>
           <a:prstGeom prst="rect">
             <a:avLst/>
